--- a/evidence/2026-10-02/run-fair/raw/libreoffice/chart-data/warmup-1.pptx
+++ b/evidence/2026-10-02/run-fair/raw/libreoffice/chart-data/warmup-1.pptx
@@ -148,11 +148,11 @@
         </c:ser>
         <c:gapWidth val="150"/>
         <c:overlap val="0"/>
-        <c:axId val="11837152"/>
-        <c:axId val="89459037"/>
+        <c:axId val="10029097"/>
+        <c:axId val="47368172"/>
       </c:barChart>
       <c:catAx>
-        <c:axId val="11837152"/>
+        <c:axId val="10029097"/>
         <c:scaling>
           <c:orientation val="minMax"/>
         </c:scaling>
@@ -185,7 +185,7 @@
             </a:pPr>
           </a:p>
         </c:txPr>
-        <c:crossAx val="89459037"/>
+        <c:crossAx val="47368172"/>
         <c:crosses val="autoZero"/>
         <c:auto val="1"/>
         <c:lblAlgn val="ctr"/>
@@ -193,7 +193,7 @@
         <c:noMultiLvlLbl val="0"/>
       </c:catAx>
       <c:valAx>
-        <c:axId val="89459037"/>
+        <c:axId val="47368172"/>
         <c:scaling>
           <c:orientation val="minMax"/>
         </c:scaling>
@@ -236,7 +236,7 @@
             </a:pPr>
           </a:p>
         </c:txPr>
-        <c:crossAx val="11837152"/>
+        <c:crossAx val="10029097"/>
         <c:crosses val="autoZero"/>
         <c:crossBetween val="between"/>
       </c:valAx>
@@ -361,11 +361,11 @@
           </c:yVal>
           <c:smooth val="0"/>
         </c:ser>
-        <c:axId val="69037451"/>
-        <c:axId val="4121517"/>
+        <c:axId val="88511596"/>
+        <c:axId val="45051674"/>
       </c:scatterChart>
       <c:valAx>
-        <c:axId val="69037451"/>
+        <c:axId val="88511596"/>
         <c:scaling>
           <c:orientation val="minMax"/>
         </c:scaling>
@@ -398,12 +398,12 @@
             </a:pPr>
           </a:p>
         </c:txPr>
-        <c:crossAx val="4121517"/>
+        <c:crossAx val="45051674"/>
         <c:crosses val="autoZero"/>
         <c:crossBetween val="midCat"/>
       </c:valAx>
       <c:valAx>
-        <c:axId val="4121517"/>
+        <c:axId val="45051674"/>
         <c:scaling>
           <c:orientation val="minMax"/>
         </c:scaling>
@@ -446,7 +446,7 @@
             </a:pPr>
           </a:p>
         </c:txPr>
-        <c:crossAx val="69037451"/>
+        <c:crossAx val="88511596"/>
         <c:crosses val="autoZero"/>
         <c:crossBetween val="midCat"/>
       </c:valAx>
@@ -645,11 +645,11 @@
           </c:bubbleSize>
           <c:bubble3D val="0"/>
         </c:ser>
-        <c:axId val="31209187"/>
-        <c:axId val="98470386"/>
+        <c:axId val="99847458"/>
+        <c:axId val="15449568"/>
       </c:bubbleChart>
       <c:valAx>
-        <c:axId val="31209187"/>
+        <c:axId val="99847458"/>
         <c:scaling>
           <c:orientation val="minMax"/>
         </c:scaling>
@@ -682,12 +682,12 @@
             </a:pPr>
           </a:p>
         </c:txPr>
-        <c:crossAx val="98470386"/>
+        <c:crossAx val="15449568"/>
         <c:crosses val="autoZero"/>
         <c:crossBetween val="midCat"/>
       </c:valAx>
       <c:valAx>
-        <c:axId val="98470386"/>
+        <c:axId val="15449568"/>
         <c:scaling>
           <c:orientation val="minMax"/>
         </c:scaling>
@@ -730,7 +730,7 @@
             </a:pPr>
           </a:p>
         </c:txPr>
-        <c:crossAx val="31209187"/>
+        <c:crossAx val="99847458"/>
         <c:crosses val="autoZero"/>
         <c:crossBetween val="midCat"/>
       </c:valAx>
@@ -1731,7 +1731,7 @@
               </a:lnSpc>
               <a:buNone/>
             </a:pPr>
-            <a:fld id="{F779AF48-D4F8-4540-BEB7-488690BAC2EB}" type="slidenum">
+            <a:fld id="{39894579-1FDA-4CE2-9E6B-35782BA5BEE3}" type="slidenum">
               <a:rPr lang="en-US" sz="1200" b="0" u="none" strike="noStrike">
                 <a:solidFill>
                   <a:schemeClr val="dk1">
@@ -2443,7 +2443,7 @@
               </a:lnSpc>
               <a:buNone/>
             </a:pPr>
-            <a:fld id="{9F27BB3C-912B-4584-9BB9-8FC537B618F0}" type="slidenum">
+            <a:fld id="{92DC1427-EF34-429B-B358-2A6D1EF720F9}" type="slidenum">
               <a:rPr lang="en-US" sz="1200" b="0" u="none" strike="noStrike">
                 <a:solidFill>
                   <a:schemeClr val="dk1">
@@ -2902,7 +2902,7 @@
               </a:lnSpc>
               <a:buNone/>
             </a:pPr>
-            <a:fld id="{38B85F85-420C-437D-AB99-1912A79BAE7F}" type="slidenum">
+            <a:fld id="{6A477511-4A71-42D8-9BFD-E6BFC8566335}" type="slidenum">
               <a:rPr lang="en-US" sz="1200" b="0" u="none" strike="noStrike">
                 <a:solidFill>
                   <a:schemeClr val="dk1">
@@ -3530,7 +3530,7 @@
               </a:lnSpc>
               <a:buNone/>
             </a:pPr>
-            <a:fld id="{F959CC4E-8CF0-41D0-A53B-FE417FA874DF}" type="slidenum">
+            <a:fld id="{9C8E8C16-B74A-4388-B799-58C1923F6841}" type="slidenum">
               <a:rPr lang="en-US" sz="1200" b="0" u="none" strike="noStrike">
                 <a:solidFill>
                   <a:schemeClr val="dk1">
@@ -4158,7 +4158,7 @@
               </a:lnSpc>
               <a:buNone/>
             </a:pPr>
-            <a:fld id="{92020787-8846-41F2-A394-EDCB54D3DC34}" type="slidenum">
+            <a:fld id="{40C22B56-60B1-4150-BE1D-FD0705F9A174}" type="slidenum">
               <a:rPr lang="en-US" sz="1200" b="0" u="none" strike="noStrike">
                 <a:solidFill>
                   <a:schemeClr val="dk1">
@@ -4786,7 +4786,7 @@
               </a:lnSpc>
               <a:buNone/>
             </a:pPr>
-            <a:fld id="{E248A4BA-81DC-47B6-B3C5-25BE8B88C73C}" type="slidenum">
+            <a:fld id="{93C6F402-B4D1-4345-A3C1-CCB7A3026012}" type="slidenum">
               <a:rPr lang="en-US" sz="1200" b="0" u="none" strike="noStrike">
                 <a:solidFill>
                   <a:schemeClr val="dk1">
@@ -5198,7 +5198,7 @@
               </a:lnSpc>
               <a:buNone/>
             </a:pPr>
-            <a:fld id="{B75CDBD4-28E8-4162-9ECC-C7282E6D81D4}" type="slidenum">
+            <a:fld id="{1CAC9235-8D9B-4BD8-AA69-AC0628416E6F}" type="slidenum">
               <a:rPr lang="en-US" sz="1200" b="0" u="none" strike="noStrike">
                 <a:solidFill>
                   <a:schemeClr val="dk1">
@@ -6132,7 +6132,7 @@
               </a:lnSpc>
               <a:buNone/>
             </a:pPr>
-            <a:fld id="{53144E53-5B88-4EC4-AA4B-2F6E6E960E0B}" type="slidenum">
+            <a:fld id="{C768EA6F-57A2-4978-915E-C0E1E3FF1D6D}" type="slidenum">
               <a:rPr lang="en-US" sz="1200" b="0" u="none" strike="noStrike">
                 <a:solidFill>
                   <a:schemeClr val="dk1">
@@ -7294,7 +7294,7 @@
               </a:lnSpc>
               <a:buNone/>
             </a:pPr>
-            <a:fld id="{47A0A403-EF02-4019-A9BA-74D8C95DA3D8}" type="slidenum">
+            <a:fld id="{E184080D-0277-4B44-8B86-FC573AF8A69F}" type="slidenum">
               <a:rPr lang="en-US" sz="1200" b="0" u="none" strike="noStrike">
                 <a:solidFill>
                   <a:schemeClr val="dk1">
@@ -7616,7 +7616,7 @@
               </a:lnSpc>
               <a:buNone/>
             </a:pPr>
-            <a:fld id="{0485A227-82FE-482D-AFC8-3454AE4ED6DA}" type="slidenum">
+            <a:fld id="{679A3571-FE01-4889-B126-117691A51215}" type="slidenum">
               <a:rPr lang="en-US" sz="1200" b="0" u="none" strike="noStrike">
                 <a:solidFill>
                   <a:schemeClr val="dk1">
@@ -7866,7 +7866,7 @@
               </a:lnSpc>
               <a:buNone/>
             </a:pPr>
-            <a:fld id="{A546CE59-E638-4D20-ABEC-6EC7465392F7}" type="slidenum">
+            <a:fld id="{EA3342A1-01D0-448D-9550-E3F160C4E026}" type="slidenum">
               <a:rPr lang="en-US" sz="1200" b="0" u="none" strike="noStrike">
                 <a:solidFill>
                   <a:schemeClr val="dk1">
